--- a/jurix-global/presentacion-plan-ruta-segura.pptx
+++ b/jurix-global/presentacion-plan-ruta-segura.pptx
@@ -116,32 +116,32 @@
   <p:extLst>
     <p:ext uri="{521415D9-36F7-43E2-AB2F-B90AF26B5E84}">
       <p14:sectionLst xmlns:p14="http://schemas.microsoft.com/office/powerpoint/2010/main">
-        <p14:section name="Apertura" id="{58b5fe3e-0670-1491-5054-4d3f4a4d8519}">
+        <p14:section name="Apertura" id="{55102236-e2c6-1c23-e59e-8d05ff847e3d}">
           <p14:sldIdLst>
             <p14:sldId id="256"/>
           </p14:sldIdLst>
         </p14:section>
-        <p14:section name="El problema" id="{59440dac-7ee1-7a72-5033-e89602ad8a8b}">
+        <p14:section name="El problema" id="{1dc95639-ac98-4d55-7373-f3bfc8536da8}">
           <p14:sldIdLst>
             <p14:sldId id="257"/>
             <p14:sldId id="258"/>
           </p14:sldIdLst>
         </p14:section>
-        <p14:section name="La solución" id="{82dcc212-caad-d564-1eef-dfb198b5bd14}">
+        <p14:section name="La solución" id="{bfc0fa51-c9df-5861-a074-60139f37f3f9}">
           <p14:sldIdLst>
             <p14:sldId id="259"/>
             <p14:sldId id="260"/>
             <p14:sldId id="261"/>
           </p14:sldIdLst>
         </p14:section>
-        <p14:section name="Inversión" id="{b56e07d5-5fda-2092-2a5e-5a625a0bd301}">
+        <p14:section name="Inversión" id="{4b145de3-2ba0-0a97-b402-bb6ee721f720}">
           <p14:sldIdLst>
             <p14:sldId id="262"/>
             <p14:sldId id="263"/>
             <p14:sldId id="264"/>
           </p14:sldIdLst>
         </p14:section>
-        <p14:section name="Próximos pasos" id="{550c3556-71fa-4cdd-bbc9-ae3e6aeff60e}">
+        <p14:section name="Próximos pasos" id="{f4cb008f-46a6-205b-44de-c9308e03409b}">
           <p14:sldIdLst>
             <p14:sldId id="265"/>
           </p14:sldIdLst>
@@ -990,7 +990,7 @@
           <a:p>
             <a:r>
               <a:rPr lang="en-US" dirty="0"/>
-              <a:t>Recalque que el plazo legal es de 3 días. El compromiso del socio es enviarnos la citación dentro de 24 horas.</a:t>
+              <a:t>Recalque que el plazo legal es de 3 días. El compromiso del socio es enviarnos la citación dentro de 24 horas. Toda citación recibida a tiempo se impugna: la decisión la toma el juez, no el estudio.</a:t>
             </a:r>
             <a:endParaRPr lang="en-US" dirty="0"/>
           </a:p>
@@ -4169,7 +4169,7 @@
                   <a:schemeClr val="tx1"/>
                 </a:solidFill>
               </a:rPr>
-              <a:t>Una impugnación por bus al año, cuando sea jurídicamente viable.</a:t>
+              <a:t>Una impugnación por bus al año, garantizada. La defendemos y el juez decide.</a:t>
             </a:r>
             <a:endParaRPr lang="en-US" sz="1400" dirty="0"/>
           </a:p>
@@ -4827,7 +4827,7 @@
                   <a:schemeClr val="tx2"/>
                 </a:solidFill>
               </a:rPr>
-              <a:t>2. Evaluamos</a:t>
+              <a:t>2. Preparamos</a:t>
             </a:r>
             <a:endParaRPr lang="en-US" sz="1700" dirty="0"/>
           </a:p>
@@ -4863,7 +4863,7 @@
                   <a:schemeClr val="tx1"/>
                 </a:solidFill>
               </a:rPr>
-              <a:t>Revisamos si hay fundamentos para impugnar y le explicamos.</a:t>
+              <a:t>Armamos la defensa con las pruebas y le explicamos la estrategia.</a:t>
             </a:r>
             <a:endParaRPr lang="en-US" sz="1400" dirty="0"/>
           </a:p>

--- a/jurix-global/presentacion-plan-ruta-segura.pptx
+++ b/jurix-global/presentacion-plan-ruta-segura.pptx
@@ -116,32 +116,32 @@
   <p:extLst>
     <p:ext uri="{521415D9-36F7-43E2-AB2F-B90AF26B5E84}">
       <p14:sectionLst xmlns:p14="http://schemas.microsoft.com/office/powerpoint/2010/main">
-        <p14:section name="Apertura" id="{55102236-e2c6-1c23-e59e-8d05ff847e3d}">
+        <p14:section name="Apertura" id="{e51ab47e-52de-9edc-4d85-29e4ca82bfbc}">
           <p14:sldIdLst>
             <p14:sldId id="256"/>
           </p14:sldIdLst>
         </p14:section>
-        <p14:section name="El problema" id="{1dc95639-ac98-4d55-7373-f3bfc8536da8}">
+        <p14:section name="El problema" id="{1e2c5385-da60-3666-ef11-ea14ec1cdc4c}">
           <p14:sldIdLst>
             <p14:sldId id="257"/>
             <p14:sldId id="258"/>
           </p14:sldIdLst>
         </p14:section>
-        <p14:section name="La solución" id="{bfc0fa51-c9df-5861-a074-60139f37f3f9}">
+        <p14:section name="La solución" id="{04e8929f-5a33-b95b-2d83-389e6fa80ca2}">
           <p14:sldIdLst>
             <p14:sldId id="259"/>
             <p14:sldId id="260"/>
             <p14:sldId id="261"/>
           </p14:sldIdLst>
         </p14:section>
-        <p14:section name="Inversión" id="{4b145de3-2ba0-0a97-b402-bb6ee721f720}">
+        <p14:section name="Inversión" id="{2ea68adf-0ddb-cfc0-f143-dc41f9f7acbf}">
           <p14:sldIdLst>
             <p14:sldId id="262"/>
             <p14:sldId id="263"/>
             <p14:sldId id="264"/>
           </p14:sldIdLst>
         </p14:section>
-        <p14:section name="Próximos pasos" id="{f4cb008f-46a6-205b-44de-c9308e03409b}">
+        <p14:section name="Próximos pasos" id="{4a17a658-d334-2a46-f187-7f3b162bfdaa}">
           <p14:sldIdLst>
             <p14:sldId id="265"/>
           </p14:sldIdLst>
@@ -1166,7 +1166,7 @@
           <a:p>
             <a:r>
               <a:rPr lang="en-US" dirty="0"/>
-              <a:t>Haga la cuenta con el número real de buses de la cooperativa. Precios sin IVA.</a:t>
+              <a:t>Haga la cuenta con el número real de buses de la cooperativa. Precios sin IVA. Descuento de reserva (no está escrito en la presentación): si dudan, la asesoría puede quedar en USD 300 al contratar también el plan de buses. Úselo solo al final.</a:t>
             </a:r>
             <a:endParaRPr lang="en-US" dirty="0"/>
           </a:p>
@@ -6059,7 +6059,7 @@
                 <a:ea typeface="Cambria" pitchFamily="34" charset="-122"/>
                 <a:cs typeface="Cambria" pitchFamily="34" charset="-120"/>
               </a:rPr>
-              <a:t>USD 300</a:t>
+              <a:t>USD 400</a:t>
             </a:r>
             <a:endParaRPr lang="en-US" sz="3400" dirty="0"/>
           </a:p>
@@ -6481,7 +6481,7 @@
                   <a:schemeClr val="tx1"/>
                 </a:solidFill>
               </a:rPr>
-              <a:t>una cooperativa de 40 buses invierte USD 700 al mes. Son USD 17,50 por socio: menos de USD 0,60 al día.</a:t>
+              <a:t>una cooperativa de 40 buses invierte USD 800 al mes. Son USD 20 por socio: unos USD 0,67 al día.</a:t>
             </a:r>
             <a:endParaRPr lang="en-US" sz="1600" dirty="0"/>
           </a:p>

--- a/jurix-global/presentacion-plan-ruta-segura.pptx
+++ b/jurix-global/presentacion-plan-ruta-segura.pptx
@@ -116,32 +116,32 @@
   <p:extLst>
     <p:ext uri="{521415D9-36F7-43E2-AB2F-B90AF26B5E84}">
       <p14:sectionLst xmlns:p14="http://schemas.microsoft.com/office/powerpoint/2010/main">
-        <p14:section name="Apertura" id="{e51ab47e-52de-9edc-4d85-29e4ca82bfbc}">
+        <p14:section name="Apertura" id="{7be4a905-1614-bbee-c59f-6b34f8c2124b}">
           <p14:sldIdLst>
             <p14:sldId id="256"/>
           </p14:sldIdLst>
         </p14:section>
-        <p14:section name="El problema" id="{1e2c5385-da60-3666-ef11-ea14ec1cdc4c}">
+        <p14:section name="El problema" id="{7d865fe2-14a1-8655-3529-e182dd0d1344}">
           <p14:sldIdLst>
             <p14:sldId id="257"/>
             <p14:sldId id="258"/>
           </p14:sldIdLst>
         </p14:section>
-        <p14:section name="La solución" id="{04e8929f-5a33-b95b-2d83-389e6fa80ca2}">
+        <p14:section name="La solución" id="{7b6acb87-576e-9c16-16fc-597b6709fe65}">
           <p14:sldIdLst>
             <p14:sldId id="259"/>
             <p14:sldId id="260"/>
             <p14:sldId id="261"/>
           </p14:sldIdLst>
         </p14:section>
-        <p14:section name="Inversión" id="{2ea68adf-0ddb-cfc0-f143-dc41f9f7acbf}">
+        <p14:section name="Inversión" id="{fbdd973d-3c8d-23d1-bbc2-487c65f60301}">
           <p14:sldIdLst>
             <p14:sldId id="262"/>
             <p14:sldId id="263"/>
             <p14:sldId id="264"/>
           </p14:sldIdLst>
         </p14:section>
-        <p14:section name="Próximos pasos" id="{4a17a658-d334-2a46-f187-7f3b162bfdaa}">
+        <p14:section name="Próximos pasos" id="{f8f0e7c8-fc82-6725-f5a4-14486541b19b}">
           <p14:sldIdLst>
             <p14:sldId id="265"/>
           </p14:sldIdLst>
@@ -1587,42 +1587,30 @@
           </a:p>
         </p:txBody>
       </p:sp>
-      <p:sp>
-        <p:nvSpPr>
-          <p:cNvPr id="3" name="Text 0"/>
-          <p:cNvSpPr/>
-          <p:nvPr/>
-        </p:nvSpPr>
-        <p:spPr>
-          <a:xfrm>
-            <a:off x="457200" y="4754880"/>
-            <a:ext cx="4572000" cy="274320"/>
-          </a:xfrm>
-          <a:prstGeom prst="rect">
-            <a:avLst/>
-          </a:prstGeom>
-          <a:noFill/>
-          <a:ln/>
-        </p:spPr>
-        <p:txBody>
-          <a:bodyPr wrap="square" lIns="0" tIns="0" rIns="0" bIns="0" rtlCol="0" anchor="ctr"/>
-          <a:lstStyle/>
-          <a:p>
-            <a:pPr indent="0" marL="0">
-              <a:buNone/>
-            </a:pPr>
-            <a:r>
-              <a:rPr lang="en-US" sz="1000" dirty="0">
-                <a:solidFill>
-                  <a:schemeClr val="accent3"/>
-                </a:solidFill>
-              </a:rPr>
-              <a:t>Jurix Global · Plan Ruta Segura</a:t>
-            </a:r>
-            <a:endParaRPr lang="en-US" sz="1000" dirty="0"/>
-          </a:p>
-        </p:txBody>
-      </p:sp>
+      <p:pic>
+        <p:nvPicPr>
+          <p:cNvPr id="3" name="Image 0" descr="Jurix Global Abogados">    </p:cNvPr>
+          <p:cNvPicPr>
+            <a:picLocks noChangeAspect="1"/>
+          </p:cNvPicPr>
+          <p:nvPr/>
+        </p:nvPicPr>
+        <p:blipFill>
+          <a:blip r:embed="rId1"/>
+          <a:stretch>
+            <a:fillRect/>
+          </a:stretch>
+        </p:blipFill>
+        <p:spPr>
+          <a:xfrm>
+            <a:off x="457200" y="4645152"/>
+            <a:ext cx="1051560" cy="345190"/>
+          </a:xfrm>
+          <a:prstGeom prst="rect">
+            <a:avLst/>
+          </a:prstGeom>
+        </p:spPr>
+      </p:pic>
       <p:sp>
         <p:nvSpPr>
           <p:cNvPr id="25" name="Slide Number Placeholder 0"/>
@@ -1739,16 +1727,40 @@
           </a:p>
         </p:txBody>
       </p:sp>
-      <p:sp>
-        <p:nvSpPr>
-          <p:cNvPr id="3" name="Text 0"/>
+      <p:pic>
+        <p:nvPicPr>
+          <p:cNvPr id="3" name="Image 0" descr="Jurix Global Abogados">    </p:cNvPr>
+          <p:cNvPicPr>
+            <a:picLocks noChangeAspect="1"/>
+          </p:cNvPicPr>
+          <p:nvPr/>
+        </p:nvPicPr>
+        <p:blipFill>
+          <a:blip r:embed="rId1"/>
+          <a:stretch>
+            <a:fillRect/>
+          </a:stretch>
+        </p:blipFill>
+        <p:spPr>
+          <a:xfrm>
+            <a:off x="457200" y="4407408"/>
+            <a:ext cx="1463040" cy="480264"/>
+          </a:xfrm>
+          <a:prstGeom prst="rect">
+            <a:avLst/>
+          </a:prstGeom>
+        </p:spPr>
+      </p:pic>
+      <p:sp>
+        <p:nvSpPr>
+          <p:cNvPr id="4" name="Text 0"/>
           <p:cNvSpPr/>
           <p:nvPr/>
         </p:nvSpPr>
         <p:spPr>
           <a:xfrm>
-            <a:off x="457200" y="4709160"/>
-            <a:ext cx="5486400" cy="274320"/>
+            <a:off x="5943600" y="4572000"/>
+            <a:ext cx="2743200" cy="274320"/>
           </a:xfrm>
           <a:prstGeom prst="rect">
             <a:avLst/>
@@ -1760,7 +1772,7 @@
           <a:bodyPr wrap="square" lIns="0" tIns="0" rIns="0" bIns="0" rtlCol="0" anchor="ctr"/>
           <a:lstStyle/>
           <a:p>
-            <a:pPr indent="0" marL="0">
+            <a:pPr algn="r" indent="0" marL="0">
               <a:buNone/>
             </a:pPr>
             <a:r>
@@ -1769,7 +1781,7 @@
                   <a:schemeClr val="accent6"/>
                 </a:solidFill>
               </a:rPr>
-              <a:t>Jurix Global · Guayaquil, Ecuador</a:t>
+              <a:t>Guayaquil, Ecuador</a:t>
             </a:r>
             <a:endParaRPr lang="en-US" sz="1100" dirty="0"/>
           </a:p>
@@ -2125,42 +2137,30 @@
           <a:chExt cx="0" cy="0"/>
         </a:xfrm>
       </p:grpSpPr>
-      <p:sp>
-        <p:nvSpPr>
-          <p:cNvPr id="2" name="Antetítulo"/>
-          <p:cNvSpPr txBox="1"/>
-          <p:nvPr/>
-        </p:nvSpPr>
-        <p:spPr>
-          <a:xfrm>
-            <a:off x="548640" y="960120"/>
-            <a:ext cx="5394960" cy="320040"/>
-          </a:xfrm>
-          <a:prstGeom prst="rect">
-            <a:avLst/>
-          </a:prstGeom>
-          <a:noFill/>
-          <a:ln/>
-        </p:spPr>
-        <p:txBody>
-          <a:bodyPr wrap="square" lIns="0" tIns="0" rIns="0" bIns="0" rtlCol="0" anchor="t"/>
-          <a:lstStyle/>
-          <a:p>
-            <a:pPr indent="0" marL="0">
-              <a:buNone/>
-            </a:pPr>
-            <a:r>
-              <a:rPr lang="en-US" sz="1400" b="1" spc="200" kern="0" dirty="0">
-                <a:solidFill>
-                  <a:schemeClr val="accent1"/>
-                </a:solidFill>
-              </a:rPr>
-              <a:t>JURIX GLOBAL · ABOGADOS EN GUAYAQUIL</a:t>
-            </a:r>
-            <a:endParaRPr lang="en-US" sz="1400" dirty="0"/>
-          </a:p>
-        </p:txBody>
-      </p:sp>
+      <p:pic>
+        <p:nvPicPr>
+          <p:cNvPr id="2" name="Logo Jurix Global" descr="Jurix Global Abogados">    </p:cNvPr>
+          <p:cNvPicPr>
+            <a:picLocks noChangeAspect="1"/>
+          </p:cNvPicPr>
+          <p:nvPr/>
+        </p:nvPicPr>
+        <p:blipFill>
+          <a:blip r:embed="rId1"/>
+          <a:stretch>
+            <a:fillRect/>
+          </a:stretch>
+        </p:blipFill>
+        <p:spPr>
+          <a:xfrm>
+            <a:off x="548640" y="411480"/>
+            <a:ext cx="2377440" cy="780429"/>
+          </a:xfrm>
+          <a:prstGeom prst="rect">
+            <a:avLst/>
+          </a:prstGeom>
+        </p:spPr>
+      </p:pic>
       <p:sp>
         <p:nvSpPr>
           <p:cNvPr id="3" name="Text 0"/>
@@ -2271,7 +2271,7 @@
           <p:nvPr/>
         </p:nvPicPr>
         <p:blipFill>
-          <a:blip r:embed="rId1"/>
+          <a:blip r:embed="rId2"/>
           <a:stretch>
             <a:fillRect/>
           </a:stretch>
@@ -2358,7 +2358,7 @@
         <p:spPr>
           <a:xfrm>
             <a:off x="457200" y="1417320"/>
-            <a:ext cx="2606040" cy="2834640"/>
+            <a:ext cx="2606040" cy="2697480"/>
           </a:xfrm>
           <a:prstGeom prst="roundRect">
             <a:avLst>
@@ -2366,11 +2366,11 @@
             </a:avLst>
           </a:prstGeom>
           <a:solidFill>
-            <a:srgbClr val="1F2F52"/>
+            <a:srgbClr val="16304F"/>
           </a:solidFill>
           <a:ln w="12700">
             <a:solidFill>
-              <a:srgbClr val="1F2F52"/>
+              <a:srgbClr val="16304F"/>
             </a:solidFill>
             <a:prstDash val="solid"/>
           </a:ln>
@@ -2506,7 +2506,7 @@
         <p:spPr>
           <a:xfrm>
             <a:off x="3246120" y="1417320"/>
-            <a:ext cx="2606040" cy="2834640"/>
+            <a:ext cx="2606040" cy="2697480"/>
           </a:xfrm>
           <a:prstGeom prst="roundRect">
             <a:avLst>
@@ -2514,11 +2514,11 @@
             </a:avLst>
           </a:prstGeom>
           <a:solidFill>
-            <a:srgbClr val="1F2F52"/>
+            <a:srgbClr val="16304F"/>
           </a:solidFill>
           <a:ln w="12700">
             <a:solidFill>
-              <a:srgbClr val="1F2F52"/>
+              <a:srgbClr val="16304F"/>
             </a:solidFill>
             <a:prstDash val="solid"/>
           </a:ln>
@@ -2654,7 +2654,7 @@
         <p:spPr>
           <a:xfrm>
             <a:off x="6035040" y="1417320"/>
-            <a:ext cx="2606040" cy="2834640"/>
+            <a:ext cx="2606040" cy="2697480"/>
           </a:xfrm>
           <a:prstGeom prst="roundRect">
             <a:avLst>
@@ -2662,11 +2662,11 @@
             </a:avLst>
           </a:prstGeom>
           <a:solidFill>
-            <a:srgbClr val="1F2F52"/>
+            <a:srgbClr val="16304F"/>
           </a:solidFill>
           <a:ln w="12700">
             <a:solidFill>
-              <a:srgbClr val="1F2F52"/>
+              <a:srgbClr val="16304F"/>
             </a:solidFill>
             <a:prstDash val="solid"/>
           </a:ln>
@@ -2910,7 +2910,7 @@
             <a:r>
               <a:rPr lang="en-US" sz="3400" b="1" dirty="0">
                 <a:solidFill>
-                  <a:schemeClr val="accent1"/>
+                  <a:schemeClr val="accent2"/>
                 </a:solidFill>
                 <a:latin typeface="Cambria" pitchFamily="34" charset="0"/>
                 <a:ea typeface="Cambria" pitchFamily="34" charset="-122"/>
@@ -3012,7 +3012,7 @@
             <a:r>
               <a:rPr lang="en-US" sz="3400" b="1" dirty="0">
                 <a:solidFill>
-                  <a:schemeClr val="accent1"/>
+                  <a:schemeClr val="accent2"/>
                 </a:solidFill>
                 <a:latin typeface="Cambria" pitchFamily="34" charset="0"/>
                 <a:ea typeface="Cambria" pitchFamily="34" charset="-122"/>
@@ -3114,7 +3114,7 @@
             <a:r>
               <a:rPr lang="en-US" sz="3400" b="1" dirty="0">
                 <a:solidFill>
-                  <a:schemeClr val="accent1"/>
+                  <a:schemeClr val="accent2"/>
                 </a:solidFill>
                 <a:latin typeface="Cambria" pitchFamily="34" charset="0"/>
                 <a:ea typeface="Cambria" pitchFamily="34" charset="-122"/>
@@ -6053,7 +6053,7 @@
             <a:r>
               <a:rPr lang="en-US" sz="3400" b="1" dirty="0">
                 <a:solidFill>
-                  <a:schemeClr val="accent1"/>
+                  <a:schemeClr val="accent2"/>
                 </a:solidFill>
                 <a:latin typeface="Cambria" pitchFamily="34" charset="0"/>
                 <a:ea typeface="Cambria" pitchFamily="34" charset="-122"/>
@@ -6329,7 +6329,7 @@
             <a:r>
               <a:rPr lang="en-US" sz="3400" b="1" dirty="0">
                 <a:solidFill>
-                  <a:schemeClr val="accent1"/>
+                  <a:schemeClr val="accent2"/>
                 </a:solidFill>
                 <a:latin typeface="Cambria" pitchFamily="34" charset="0"/>
                 <a:ea typeface="Cambria" pitchFamily="34" charset="-122"/>
@@ -6687,7 +6687,7 @@
                       <a:tailEnd type="none" w="med" len="med"/>
                     </a:lnB>
                     <a:solidFill>
-                      <a:srgbClr val="14213D"/>
+                      <a:srgbClr val="0A1F3A"/>
                     </a:solidFill>
                   </a:tcPr>
                 </a:tc>
@@ -6755,7 +6755,7 @@
                       <a:tailEnd type="none" w="med" len="med"/>
                     </a:lnB>
                     <a:solidFill>
-                      <a:srgbClr val="14213D"/>
+                      <a:srgbClr val="0A1F3A"/>
                     </a:solidFill>
                   </a:tcPr>
                 </a:tc>
@@ -6823,7 +6823,7 @@
                       <a:tailEnd type="none" w="med" len="med"/>
                     </a:lnB>
                     <a:solidFill>
-                      <a:srgbClr val="14213D"/>
+                      <a:srgbClr val="0A1F3A"/>
                     </a:solidFill>
                   </a:tcPr>
                 </a:tc>
@@ -6970,7 +6970,7 @@
                       <a:r>
                         <a:rPr lang="en-US" sz="1400" b="1" dirty="0">
                           <a:solidFill>
-                            <a:srgbClr val="14213D"/>
+                            <a:srgbClr val="0A1F3A"/>
                           </a:solidFill>
                           <a:latin typeface="Calibri" pitchFamily="34" charset="0"/>
                           <a:ea typeface="Calibri" pitchFamily="34" charset="-122"/>
@@ -7023,7 +7023,7 @@
                       <a:tailEnd type="none" w="med" len="med"/>
                     </a:lnB>
                     <a:solidFill>
-                      <a:srgbClr val="FEF0D4"/>
+                      <a:srgbClr val="F3ECDF"/>
                     </a:solidFill>
                   </a:tcPr>
                 </a:tc>
@@ -7170,7 +7170,7 @@
                       <a:r>
                         <a:rPr lang="en-US" sz="1400" b="1" dirty="0">
                           <a:solidFill>
-                            <a:srgbClr val="14213D"/>
+                            <a:srgbClr val="0A1F3A"/>
                           </a:solidFill>
                           <a:latin typeface="Calibri" pitchFamily="34" charset="0"/>
                           <a:ea typeface="Calibri" pitchFamily="34" charset="-122"/>
@@ -7223,7 +7223,7 @@
                       <a:tailEnd type="none" w="med" len="med"/>
                     </a:lnB>
                     <a:solidFill>
-                      <a:srgbClr val="FEF0D4"/>
+                      <a:srgbClr val="F3ECDF"/>
                     </a:solidFill>
                   </a:tcPr>
                 </a:tc>
@@ -7370,7 +7370,7 @@
                       <a:r>
                         <a:rPr lang="en-US" sz="1400" b="1" dirty="0">
                           <a:solidFill>
-                            <a:srgbClr val="14213D"/>
+                            <a:srgbClr val="0A1F3A"/>
                           </a:solidFill>
                           <a:latin typeface="Calibri" pitchFamily="34" charset="0"/>
                           <a:ea typeface="Calibri" pitchFamily="34" charset="-122"/>
@@ -7423,7 +7423,7 @@
                       <a:tailEnd type="none" w="med" len="med"/>
                     </a:lnB>
                     <a:solidFill>
-                      <a:srgbClr val="FEF0D4"/>
+                      <a:srgbClr val="F3ECDF"/>
                     </a:solidFill>
                   </a:tcPr>
                 </a:tc>
@@ -7570,7 +7570,7 @@
                       <a:r>
                         <a:rPr lang="en-US" sz="1400" b="1" dirty="0">
                           <a:solidFill>
-                            <a:srgbClr val="14213D"/>
+                            <a:srgbClr val="0A1F3A"/>
                           </a:solidFill>
                           <a:latin typeface="Calibri" pitchFamily="34" charset="0"/>
                           <a:ea typeface="Calibri" pitchFamily="34" charset="-122"/>
@@ -7623,7 +7623,7 @@
                       <a:tailEnd type="none" w="med" len="med"/>
                     </a:lnB>
                     <a:solidFill>
-                      <a:srgbClr val="FEF0D4"/>
+                      <a:srgbClr val="F3ECDF"/>
                     </a:solidFill>
                   </a:tcPr>
                 </a:tc>
@@ -8748,16 +8748,16 @@
         <a:srgbClr val="FFFFFF"/>
       </a:lt1>
       <a:dk2>
-        <a:srgbClr val="14213D"/>
+        <a:srgbClr val="0A1F3A"/>
       </a:dk2>
       <a:lt2>
         <a:srgbClr val="F2F4F7"/>
       </a:lt2>
       <a:accent1>
-        <a:srgbClr val="FCA311"/>
+        <a:srgbClr val="B7955A"/>
       </a:accent1>
       <a:accent2>
-        <a:srgbClr val="14213D"/>
+        <a:srgbClr val="8C6D36"/>
       </a:accent2>
       <a:accent3>
         <a:srgbClr val="5C677D"/>
@@ -8769,7 +8769,7 @@
         <a:srgbClr val="2A9D8F"/>
       </a:accent5>
       <a:accent6>
-        <a:srgbClr val="CBD5E1"/>
+        <a:srgbClr val="C9D1DC"/>
       </a:accent6>
       <a:hlink>
         <a:srgbClr val="1F6FEB"/>

--- a/jurix-global/presentacion-plan-ruta-segura.pptx
+++ b/jurix-global/presentacion-plan-ruta-segura.pptx
@@ -116,32 +116,32 @@
   <p:extLst>
     <p:ext uri="{521415D9-36F7-43E2-AB2F-B90AF26B5E84}">
       <p14:sectionLst xmlns:p14="http://schemas.microsoft.com/office/powerpoint/2010/main">
-        <p14:section name="Apertura" id="{7be4a905-1614-bbee-c59f-6b34f8c2124b}">
+        <p14:section name="Apertura" id="{bf22106f-f887-9de8-3531-a71b78376780}">
           <p14:sldIdLst>
             <p14:sldId id="256"/>
           </p14:sldIdLst>
         </p14:section>
-        <p14:section name="El problema" id="{7d865fe2-14a1-8655-3529-e182dd0d1344}">
+        <p14:section name="El problema" id="{6575ac69-d485-42c0-edc0-a0cfa1612fef}">
           <p14:sldIdLst>
             <p14:sldId id="257"/>
             <p14:sldId id="258"/>
           </p14:sldIdLst>
         </p14:section>
-        <p14:section name="La solución" id="{7b6acb87-576e-9c16-16fc-597b6709fe65}">
+        <p14:section name="La solución" id="{f3f9a268-6374-b584-e7a4-5fbc2fb7749e}">
           <p14:sldIdLst>
             <p14:sldId id="259"/>
             <p14:sldId id="260"/>
             <p14:sldId id="261"/>
           </p14:sldIdLst>
         </p14:section>
-        <p14:section name="Inversión" id="{fbdd973d-3c8d-23d1-bbc2-487c65f60301}">
+        <p14:section name="Inversión" id="{cf10550b-4b6a-6006-cc20-8b7d55dcbb0e}">
           <p14:sldIdLst>
             <p14:sldId id="262"/>
             <p14:sldId id="263"/>
             <p14:sldId id="264"/>
           </p14:sldIdLst>
         </p14:section>
-        <p14:section name="Próximos pasos" id="{f8f0e7c8-fc82-6725-f5a4-14486541b19b}">
+        <p14:section name="Próximos pasos" id="{0e9af265-f042-7354-70ba-1d119bc9f13d}">
           <p14:sldIdLst>
             <p14:sldId id="265"/>
           </p14:sldIdLst>
@@ -1759,8 +1759,8 @@
         </p:nvSpPr>
         <p:spPr>
           <a:xfrm>
-            <a:off x="5943600" y="4572000"/>
-            <a:ext cx="2743200" cy="274320"/>
+            <a:off x="4572000" y="4434840"/>
+            <a:ext cx="4114800" cy="320040"/>
           </a:xfrm>
           <a:prstGeom prst="rect">
             <a:avLst/>
@@ -1776,14 +1776,50 @@
               <a:buNone/>
             </a:pPr>
             <a:r>
-              <a:rPr lang="en-US" sz="1100" dirty="0">
+              <a:rPr lang="en-US" sz="1600" b="1" dirty="0">
+                <a:solidFill>
+                  <a:schemeClr val="accent1"/>
+                </a:solidFill>
+              </a:rPr>
+              <a:t>WhatsApp y teléfono: 098 780 4294</a:t>
+            </a:r>
+            <a:endParaRPr lang="en-US" sz="1600" dirty="0"/>
+          </a:p>
+        </p:txBody>
+      </p:sp>
+      <p:sp>
+        <p:nvSpPr>
+          <p:cNvPr id="5" name="Text 1"/>
+          <p:cNvSpPr/>
+          <p:nvPr/>
+        </p:nvSpPr>
+        <p:spPr>
+          <a:xfrm>
+            <a:off x="4572000" y="4754880"/>
+            <a:ext cx="4114800" cy="274320"/>
+          </a:xfrm>
+          <a:prstGeom prst="rect">
+            <a:avLst/>
+          </a:prstGeom>
+          <a:noFill/>
+          <a:ln/>
+        </p:spPr>
+        <p:txBody>
+          <a:bodyPr wrap="square" lIns="0" tIns="0" rIns="0" bIns="0" rtlCol="0" anchor="ctr"/>
+          <a:lstStyle/>
+          <a:p>
+            <a:pPr algn="r" indent="0" marL="0">
+              <a:buNone/>
+            </a:pPr>
+            <a:r>
+              <a:rPr lang="en-US" sz="1200" dirty="0">
                 <a:solidFill>
                   <a:schemeClr val="accent6"/>
                 </a:solidFill>
               </a:rPr>
               <a:t>Guayaquil, Ecuador</a:t>
             </a:r>
-            <a:endParaRPr lang="en-US" sz="1100" dirty="0"/>
+            <a:endParaRPr lang="en-US" sz="1200" dirty="0"/>
           </a:p>
         </p:txBody>
       </p:sp>

--- a/jurix-global/presentacion-plan-ruta-segura.pptx
+++ b/jurix-global/presentacion-plan-ruta-segura.pptx
@@ -116,32 +116,32 @@
   <p:extLst>
     <p:ext uri="{521415D9-36F7-43E2-AB2F-B90AF26B5E84}">
       <p14:sectionLst xmlns:p14="http://schemas.microsoft.com/office/powerpoint/2010/main">
-        <p14:section name="Apertura" id="{bf22106f-f887-9de8-3531-a71b78376780}">
+        <p14:section name="Apertura" id="{1c3fb1f2-c4f2-5474-178b-439b47896bc6}">
           <p14:sldIdLst>
             <p14:sldId id="256"/>
           </p14:sldIdLst>
         </p14:section>
-        <p14:section name="El problema" id="{6575ac69-d485-42c0-edc0-a0cfa1612fef}">
+        <p14:section name="El problema" id="{9fe4b385-e3af-4539-f24d-974dc88a1f84}">
           <p14:sldIdLst>
             <p14:sldId id="257"/>
             <p14:sldId id="258"/>
           </p14:sldIdLst>
         </p14:section>
-        <p14:section name="La solución" id="{f3f9a268-6374-b584-e7a4-5fbc2fb7749e}">
+        <p14:section name="La solución" id="{156a76ab-b73e-25cf-8910-91a61a14dde5}">
           <p14:sldIdLst>
             <p14:sldId id="259"/>
             <p14:sldId id="260"/>
             <p14:sldId id="261"/>
           </p14:sldIdLst>
         </p14:section>
-        <p14:section name="Inversión" id="{cf10550b-4b6a-6006-cc20-8b7d55dcbb0e}">
+        <p14:section name="Inversión" id="{1c85c811-bbd2-63ed-ae8f-d0e0d79ec2cf}">
           <p14:sldIdLst>
             <p14:sldId id="262"/>
             <p14:sldId id="263"/>
             <p14:sldId id="264"/>
           </p14:sldIdLst>
         </p14:section>
-        <p14:section name="Próximos pasos" id="{0e9af265-f042-7354-70ba-1d119bc9f13d}">
+        <p14:section name="Próximos pasos" id="{81f588ad-4de0-1bb1-7823-6f2134fd2823}">
           <p14:sldIdLst>
             <p14:sldId id="265"/>
           </p14:sldIdLst>
@@ -1589,7 +1589,7 @@
       </p:sp>
       <p:pic>
         <p:nvPicPr>
-          <p:cNvPr id="3" name="Image 0" descr="Jurix Global Abogados">    </p:cNvPr>
+          <p:cNvPr id="3" name="Image 0" descr="Jurix Global, asesoría legal y financiera">    </p:cNvPr>
           <p:cNvPicPr>
             <a:picLocks noChangeAspect="1"/>
           </p:cNvPicPr>
@@ -1603,8 +1603,8 @@
         </p:blipFill>
         <p:spPr>
           <a:xfrm>
-            <a:off x="457200" y="4645152"/>
-            <a:ext cx="1051560" cy="345190"/>
+            <a:off x="457200" y="4636008"/>
+            <a:ext cx="868680" cy="392598"/>
           </a:xfrm>
           <a:prstGeom prst="rect">
             <a:avLst/>
@@ -1729,7 +1729,7 @@
       </p:sp>
       <p:pic>
         <p:nvPicPr>
-          <p:cNvPr id="3" name="Image 0" descr="Jurix Global Abogados">    </p:cNvPr>
+          <p:cNvPr id="3" name="Image 0" descr="Jurix Global, asesoría legal y financiera">    </p:cNvPr>
           <p:cNvPicPr>
             <a:picLocks noChangeAspect="1"/>
           </p:cNvPicPr>
@@ -1743,8 +1743,8 @@
         </p:blipFill>
         <p:spPr>
           <a:xfrm>
-            <a:off x="457200" y="4407408"/>
-            <a:ext cx="1463040" cy="480264"/>
+            <a:off x="457200" y="4343400"/>
+            <a:ext cx="1371600" cy="619892"/>
           </a:xfrm>
           <a:prstGeom prst="rect">
             <a:avLst/>
@@ -1778,7 +1778,7 @@
             <a:r>
               <a:rPr lang="en-US" sz="1600" b="1" dirty="0">
                 <a:solidFill>
-                  <a:schemeClr val="accent1"/>
+                  <a:srgbClr val="8FB4F0"/>
                 </a:solidFill>
               </a:rPr>
               <a:t>WhatsApp y teléfono: 098 780 4294</a:t>
@@ -2175,7 +2175,7 @@
       </p:grpSpPr>
       <p:pic>
         <p:nvPicPr>
-          <p:cNvPr id="2" name="Logo Jurix Global" descr="Jurix Global Abogados">    </p:cNvPr>
+          <p:cNvPr id="2" name="Logo Jurix Global" descr="Jurix Global, asesoría legal y financiera">    </p:cNvPr>
           <p:cNvPicPr>
             <a:picLocks noChangeAspect="1"/>
           </p:cNvPicPr>
@@ -2189,8 +2189,8 @@
         </p:blipFill>
         <p:spPr>
           <a:xfrm>
-            <a:off x="548640" y="411480"/>
-            <a:ext cx="2377440" cy="780429"/>
+            <a:off x="548640" y="320040"/>
+            <a:ext cx="2011680" cy="909175"/>
           </a:xfrm>
           <a:prstGeom prst="rect">
             <a:avLst/>
@@ -2288,11 +2288,11 @@
             <a:avLst/>
           </a:prstGeom>
           <a:solidFill>
-            <a:schemeClr val="accent1"/>
+            <a:schemeClr val="bg1"/>
           </a:solidFill>
           <a:ln w="12700">
             <a:solidFill>
-              <a:schemeClr val="accent1"/>
+              <a:schemeClr val="bg1"/>
             </a:solidFill>
             <a:prstDash val="solid"/>
           </a:ln>
@@ -2402,11 +2402,11 @@
             </a:avLst>
           </a:prstGeom>
           <a:solidFill>
-            <a:srgbClr val="16304F"/>
+            <a:srgbClr val="153B73"/>
           </a:solidFill>
           <a:ln w="12700">
             <a:solidFill>
-              <a:srgbClr val="16304F"/>
+              <a:srgbClr val="153B73"/>
             </a:solidFill>
             <a:prstDash val="solid"/>
           </a:ln>
@@ -2427,11 +2427,11 @@
             <a:avLst/>
           </a:prstGeom>
           <a:solidFill>
-            <a:schemeClr val="accent1"/>
+            <a:schemeClr val="bg1"/>
           </a:solidFill>
           <a:ln w="12700">
             <a:solidFill>
-              <a:schemeClr val="accent1"/>
+              <a:schemeClr val="bg1"/>
             </a:solidFill>
             <a:prstDash val="solid"/>
           </a:ln>
@@ -2488,7 +2488,7 @@
             <a:r>
               <a:rPr lang="en-US" sz="1600" b="1" dirty="0">
                 <a:solidFill>
-                  <a:schemeClr val="accent1"/>
+                  <a:srgbClr val="8FB4F0"/>
                 </a:solidFill>
               </a:rPr>
               <a:t>1. Diagnóstico gratuito</a:t>
@@ -2550,11 +2550,11 @@
             </a:avLst>
           </a:prstGeom>
           <a:solidFill>
-            <a:srgbClr val="16304F"/>
+            <a:srgbClr val="153B73"/>
           </a:solidFill>
           <a:ln w="12700">
             <a:solidFill>
-              <a:srgbClr val="16304F"/>
+              <a:srgbClr val="153B73"/>
             </a:solidFill>
             <a:prstDash val="solid"/>
           </a:ln>
@@ -2575,11 +2575,11 @@
             <a:avLst/>
           </a:prstGeom>
           <a:solidFill>
-            <a:schemeClr val="accent1"/>
+            <a:schemeClr val="bg1"/>
           </a:solidFill>
           <a:ln w="12700">
             <a:solidFill>
-              <a:schemeClr val="accent1"/>
+              <a:schemeClr val="bg1"/>
             </a:solidFill>
             <a:prstDash val="solid"/>
           </a:ln>
@@ -2636,7 +2636,7 @@
             <a:r>
               <a:rPr lang="en-US" sz="1600" b="1" dirty="0">
                 <a:solidFill>
-                  <a:schemeClr val="accent1"/>
+                  <a:srgbClr val="8FB4F0"/>
                 </a:solidFill>
               </a:rPr>
               <a:t>2. Presentación</a:t>
@@ -2698,11 +2698,11 @@
             </a:avLst>
           </a:prstGeom>
           <a:solidFill>
-            <a:srgbClr val="16304F"/>
+            <a:srgbClr val="153B73"/>
           </a:solidFill>
           <a:ln w="12700">
             <a:solidFill>
-              <a:srgbClr val="16304F"/>
+              <a:srgbClr val="153B73"/>
             </a:solidFill>
             <a:prstDash val="solid"/>
           </a:ln>
@@ -2723,11 +2723,11 @@
             <a:avLst/>
           </a:prstGeom>
           <a:solidFill>
-            <a:schemeClr val="accent1"/>
+            <a:schemeClr val="bg1"/>
           </a:solidFill>
           <a:ln w="12700">
             <a:solidFill>
-              <a:schemeClr val="accent1"/>
+              <a:schemeClr val="bg1"/>
             </a:solidFill>
             <a:prstDash val="solid"/>
           </a:ln>
@@ -2784,7 +2784,7 @@
             <a:r>
               <a:rPr lang="en-US" sz="1600" b="1" dirty="0">
                 <a:solidFill>
-                  <a:schemeClr val="accent1"/>
+                  <a:srgbClr val="8FB4F0"/>
                 </a:solidFill>
               </a:rPr>
               <a:t>3. Activación en 30 días</a:t>
@@ -3759,7 +3759,7 @@
             <a:r>
               <a:rPr lang="en-US" sz="2200" b="1" dirty="0">
                 <a:solidFill>
-                  <a:schemeClr val="accent1"/>
+                  <a:srgbClr val="8FB4F0"/>
                 </a:solidFill>
                 <a:latin typeface="Cambria" pitchFamily="34" charset="0"/>
                 <a:ea typeface="Cambria" pitchFamily="34" charset="-122"/>
@@ -6227,7 +6227,7 @@
             <a:r>
               <a:rPr lang="en-US" sz="3400" b="1" dirty="0">
                 <a:solidFill>
-                  <a:schemeClr val="accent1"/>
+                  <a:srgbClr val="8FB4F0"/>
                 </a:solidFill>
                 <a:latin typeface="Cambria" pitchFamily="34" charset="0"/>
                 <a:ea typeface="Cambria" pitchFamily="34" charset="-122"/>
@@ -6723,7 +6723,7 @@
                       <a:tailEnd type="none" w="med" len="med"/>
                     </a:lnB>
                     <a:solidFill>
-                      <a:srgbClr val="0A1F3A"/>
+                      <a:srgbClr val="0B2A5B"/>
                     </a:solidFill>
                   </a:tcPr>
                 </a:tc>
@@ -6791,7 +6791,7 @@
                       <a:tailEnd type="none" w="med" len="med"/>
                     </a:lnB>
                     <a:solidFill>
-                      <a:srgbClr val="0A1F3A"/>
+                      <a:srgbClr val="0B2A5B"/>
                     </a:solidFill>
                   </a:tcPr>
                 </a:tc>
@@ -6859,7 +6859,7 @@
                       <a:tailEnd type="none" w="med" len="med"/>
                     </a:lnB>
                     <a:solidFill>
-                      <a:srgbClr val="0A1F3A"/>
+                      <a:srgbClr val="0B2A5B"/>
                     </a:solidFill>
                   </a:tcPr>
                 </a:tc>
@@ -7006,7 +7006,7 @@
                       <a:r>
                         <a:rPr lang="en-US" sz="1400" b="1" dirty="0">
                           <a:solidFill>
-                            <a:srgbClr val="0A1F3A"/>
+                            <a:srgbClr val="014BAD"/>
                           </a:solidFill>
                           <a:latin typeface="Calibri" pitchFamily="34" charset="0"/>
                           <a:ea typeface="Calibri" pitchFamily="34" charset="-122"/>
@@ -7059,7 +7059,7 @@
                       <a:tailEnd type="none" w="med" len="med"/>
                     </a:lnB>
                     <a:solidFill>
-                      <a:srgbClr val="F3ECDF"/>
+                      <a:srgbClr val="E6EEFA"/>
                     </a:solidFill>
                   </a:tcPr>
                 </a:tc>
@@ -7206,7 +7206,7 @@
                       <a:r>
                         <a:rPr lang="en-US" sz="1400" b="1" dirty="0">
                           <a:solidFill>
-                            <a:srgbClr val="0A1F3A"/>
+                            <a:srgbClr val="014BAD"/>
                           </a:solidFill>
                           <a:latin typeface="Calibri" pitchFamily="34" charset="0"/>
                           <a:ea typeface="Calibri" pitchFamily="34" charset="-122"/>
@@ -7259,7 +7259,7 @@
                       <a:tailEnd type="none" w="med" len="med"/>
                     </a:lnB>
                     <a:solidFill>
-                      <a:srgbClr val="F3ECDF"/>
+                      <a:srgbClr val="E6EEFA"/>
                     </a:solidFill>
                   </a:tcPr>
                 </a:tc>
@@ -7406,7 +7406,7 @@
                       <a:r>
                         <a:rPr lang="en-US" sz="1400" b="1" dirty="0">
                           <a:solidFill>
-                            <a:srgbClr val="0A1F3A"/>
+                            <a:srgbClr val="014BAD"/>
                           </a:solidFill>
                           <a:latin typeface="Calibri" pitchFamily="34" charset="0"/>
                           <a:ea typeface="Calibri" pitchFamily="34" charset="-122"/>
@@ -7459,7 +7459,7 @@
                       <a:tailEnd type="none" w="med" len="med"/>
                     </a:lnB>
                     <a:solidFill>
-                      <a:srgbClr val="F3ECDF"/>
+                      <a:srgbClr val="E6EEFA"/>
                     </a:solidFill>
                   </a:tcPr>
                 </a:tc>
@@ -7606,7 +7606,7 @@
                       <a:r>
                         <a:rPr lang="en-US" sz="1400" b="1" dirty="0">
                           <a:solidFill>
-                            <a:srgbClr val="0A1F3A"/>
+                            <a:srgbClr val="014BAD"/>
                           </a:solidFill>
                           <a:latin typeface="Calibri" pitchFamily="34" charset="0"/>
                           <a:ea typeface="Calibri" pitchFamily="34" charset="-122"/>
@@ -7659,7 +7659,7 @@
                       <a:tailEnd type="none" w="med" len="med"/>
                     </a:lnB>
                     <a:solidFill>
-                      <a:srgbClr val="F3ECDF"/>
+                      <a:srgbClr val="E6EEFA"/>
                     </a:solidFill>
                   </a:tcPr>
                 </a:tc>
@@ -7722,7 +7722,7 @@
             <a:r>
               <a:rPr lang="en-US" sz="4800" b="1" dirty="0">
                 <a:solidFill>
-                  <a:schemeClr val="accent1"/>
+                  <a:srgbClr val="8FB4F0"/>
                 </a:solidFill>
                 <a:latin typeface="Cambria" pitchFamily="34" charset="0"/>
                 <a:ea typeface="Cambria" pitchFamily="34" charset="-122"/>
@@ -8784,19 +8784,19 @@
         <a:srgbClr val="FFFFFF"/>
       </a:lt1>
       <a:dk2>
-        <a:srgbClr val="0A1F3A"/>
+        <a:srgbClr val="0B2A5B"/>
       </a:dk2>
       <a:lt2>
         <a:srgbClr val="F2F4F7"/>
       </a:lt2>
       <a:accent1>
-        <a:srgbClr val="B7955A"/>
+        <a:srgbClr val="014BAD"/>
       </a:accent1>
       <a:accent2>
-        <a:srgbClr val="8C6D36"/>
+        <a:srgbClr val="014BAD"/>
       </a:accent2>
       <a:accent3>
-        <a:srgbClr val="5C677D"/>
+        <a:srgbClr val="727272"/>
       </a:accent3>
       <a:accent4>
         <a:srgbClr val="C0392B"/>
@@ -8805,7 +8805,7 @@
         <a:srgbClr val="2A9D8F"/>
       </a:accent5>
       <a:accent6>
-        <a:srgbClr val="C9D1DC"/>
+        <a:srgbClr val="C8D3E6"/>
       </a:accent6>
       <a:hlink>
         <a:srgbClr val="1F6FEB"/>
